--- a/civitas_pitch_deck.pptx
+++ b/civitas_pitch_deck.pptx
@@ -3118,7 +3118,7 @@
         </p:nvSpPr>
         <p:spPr>
           <a:xfrm>
-            <a:off x="0" y="0"/>
+            <a:off x="11151" y="0"/>
             <a:ext cx="12191695" cy="3291840"/>
           </a:xfrm>
           <a:prstGeom prst="rect">
